--- a/docs/manual/열린카페-사용자매뉴얼.pptx
+++ b/docs/manual/열린카페-사용자매뉴얼.pptx
@@ -3368,7 +3368,7 @@
                 </a:solidFill>
                 <a:latin typeface="Malgun Gothic"/>
               </a:rPr>
-              <a:t>쿠폰 — 잔액과 무료 1잔</a:t>
+              <a:t>이름 → 완료</a:t>
             </a:r>
           </a:p>
         </p:txBody>
@@ -3403,7 +3403,7 @@
                 </a:solidFill>
                 <a:latin typeface="Malgun Gothic"/>
               </a:rPr>
-              <a:t>주문 7/8</a:t>
+              <a:t>주문 7/7</a:t>
             </a:r>
           </a:p>
         </p:txBody>
@@ -3493,7 +3493,7 @@
       </p:sp>
       <p:pic>
         <p:nvPicPr>
-          <p:cNvPr id="7" name="Picture 6" descr="k14-coupon-found.png"/>
+          <p:cNvPr id="7" name="Picture 6" descr="k09-name.png"/>
           <p:cNvPicPr>
             <a:picLocks noChangeAspect="1"/>
           </p:cNvPicPr>
@@ -3565,7 +3565,7 @@
       </p:sp>
       <p:pic>
         <p:nvPicPr>
-          <p:cNvPr id="9" name="Picture 8" descr="k15-coupon-free.png"/>
+          <p:cNvPr id="9" name="Picture 8" descr="k11-done.png"/>
           <p:cNvPicPr>
             <a:picLocks noChangeAspect="1"/>
           </p:cNvPicPr>
@@ -3621,23 +3621,7 @@
                 </a:solidFill>
                 <a:latin typeface="Malgun Gothic"/>
               </a:rPr>
-              <a:t>•  잔액이 크게 보이고, 주문 금액 전액이 잔액에서 빠진다</a:t>
-            </a:r>
-          </a:p>
-          <a:p>
-            <a:pPr>
-              <a:spcAft>
-                <a:spcPts val="500"/>
-              </a:spcAft>
-            </a:pPr>
-            <a:r>
-              <a:rPr b="1" sz="1600">
-                <a:solidFill>
-                  <a:srgbClr val="6B452B"/>
-                </a:solidFill>
-                <a:latin typeface="Malgun Gothic"/>
-              </a:rPr>
-              <a:t>무료 1잔 쓰기</a:t>
+              <a:t>•  최근 3주 안에 주문한 이름이 가나다순 버튼으로. 없으면 [이름 직접 입력]</a:t>
             </a:r>
           </a:p>
           <a:p>
@@ -3653,7 +3637,7 @@
                 </a:solidFill>
                 <a:latin typeface="Malgun Gothic"/>
               </a:rPr>
-              <a:t>•  남은 무료 1잔이 있으면 체크박스. 켜면 이번 주문에서 가장 비싼 한 잔(옵션 포함가)이 무료</a:t>
+              <a:t>•  이름은 20자까지. 음료가 되면 이 이름으로 부른다</a:t>
             </a:r>
           </a:p>
           <a:p>
@@ -3669,23 +3653,7 @@
                 </a:solidFill>
                 <a:latin typeface="Malgun Gothic"/>
               </a:rPr>
-              <a:t>•  사역자 무료로 표시한 잔은 무료 1잔 후보가 아니다</a:t>
-            </a:r>
-          </a:p>
-          <a:p>
-            <a:pPr>
-              <a:spcAft>
-                <a:spcPts val="500"/>
-              </a:spcAft>
-            </a:pPr>
-            <a:r>
-              <a:rPr b="1" sz="1600">
-                <a:solidFill>
-                  <a:srgbClr val="6B452B"/>
-                </a:solidFill>
-                <a:latin typeface="Malgun Gothic"/>
-              </a:rPr>
-              <a:t>잔액 부족</a:t>
+              <a:t>•  [주문 완료] 를 누르면 접수. 주문 번호가 크게 보인다 (당일 1번부터)</a:t>
             </a:r>
           </a:p>
           <a:p>
@@ -3701,7 +3669,7 @@
                 </a:solidFill>
                 <a:latin typeface="Malgun Gothic"/>
               </a:rPr>
-              <a:t>•  잔액을 다 쓰고 남는 금액은 현금 또는 계좌이체 중 골라서 낸다</a:t>
+              <a:t>•  현금 거스름돈이 있으면 "쿠폰에 충전해 드려요 — 스태프에게 말씀해 주세요" 안내</a:t>
             </a:r>
           </a:p>
           <a:p>
@@ -3717,7 +3685,23 @@
                 </a:solidFill>
                 <a:latin typeface="Malgun Gothic"/>
               </a:rPr>
-              <a:t>•  현금이면 낸 돈/거스름돈 화면을 한 번 더 거친다</a:t>
+              <a:t>•  [처음으로] 를 누르거나 2분 동안 안 건드리면 첫 화면으로 돌아간다</a:t>
+            </a:r>
+          </a:p>
+          <a:p>
+            <a:pPr>
+              <a:spcAft>
+                <a:spcPts val="500"/>
+              </a:spcAft>
+            </a:pPr>
+            <a:r>
+              <a:rPr sz="1500">
+                <a:solidFill>
+                  <a:srgbClr val="2B221C"/>
+                </a:solidFill>
+                <a:latin typeface="Malgun Gothic"/>
+              </a:rPr>
+              <a:t>•  와이파이가 잠깐 끊겨 두 번 눌러도 주문은 한 번만 들어간다</a:t>
             </a:r>
           </a:p>
         </p:txBody>
@@ -3756,8 +3740,8 @@
         </p:nvSpPr>
         <p:spPr>
           <a:xfrm>
-            <a:off x="0" y="0"/>
-            <a:ext cx="12191695" cy="868680"/>
+            <a:off x="0" y="2377440"/>
+            <a:ext cx="12191695" cy="2103120"/>
           </a:xfrm>
           <a:prstGeom prst="rect">
             <a:avLst/>
@@ -3800,8 +3784,8 @@
         </p:nvSpPr>
         <p:spPr>
           <a:xfrm>
-            <a:off x="457200" y="109728"/>
-            <a:ext cx="10058400" cy="685800"/>
+            <a:off x="914400" y="2560320"/>
+            <a:ext cx="10332720" cy="914400"/>
           </a:xfrm>
           <a:prstGeom prst="rect">
             <a:avLst/>
@@ -3816,13 +3800,13 @@
           <a:p>
             <a:pPr algn="l"/>
             <a:r>
-              <a:rPr sz="2600" b="1">
+              <a:rPr sz="3600" b="1">
                 <a:solidFill>
                   <a:srgbClr val="FFFFFF"/>
                 </a:solidFill>
                 <a:latin typeface="Malgun Gothic"/>
               </a:rPr>
-              <a:t>이름 → 완료</a:t>
+              <a:t>2부. 스태프 화면 (폰)</a:t>
             </a:r>
           </a:p>
         </p:txBody>
@@ -3835,43 +3819,8 @@
         </p:nvSpPr>
         <p:spPr>
           <a:xfrm>
-            <a:off x="8503920" y="228600"/>
-            <a:ext cx="3291840" cy="457200"/>
-          </a:xfrm>
-          <a:prstGeom prst="rect">
-            <a:avLst/>
-          </a:prstGeom>
-          <a:noFill/>
-        </p:spPr>
-        <p:txBody>
-          <a:bodyPr wrap="square" anchor="ctr" lIns="45720" rIns="45720" tIns="27432" bIns="27432">
-            <a:spAutoFit/>
-          </a:bodyPr>
-          <a:lstStyle/>
-          <a:p>
-            <a:pPr algn="r"/>
-            <a:r>
-              <a:rPr sz="1300" b="0">
-                <a:solidFill>
-                  <a:srgbClr val="EEE3D6"/>
-                </a:solidFill>
-                <a:latin typeface="Malgun Gothic"/>
-              </a:rPr>
-              <a:t>주문 8/8</a:t>
-            </a:r>
-          </a:p>
-        </p:txBody>
-      </p:sp>
-      <p:sp>
-        <p:nvSpPr>
-          <p:cNvPr id="5" name="TextBox 4"/>
-          <p:cNvSpPr txBox="1"/>
-          <p:nvPr/>
-        </p:nvSpPr>
-        <p:spPr>
-          <a:xfrm>
-            <a:off x="11247120" y="6446520"/>
-            <a:ext cx="822960" cy="320040"/>
+            <a:off x="914400" y="3474720"/>
+            <a:ext cx="10332720" cy="822960"/>
           </a:xfrm>
           <a:prstGeom prst="rect">
             <a:avLst/>
@@ -3884,262 +3833,15 @@
           </a:bodyPr>
           <a:lstStyle/>
           <a:p>
-            <a:pPr algn="r"/>
-            <a:r>
-              <a:rPr sz="1000" b="0">
-                <a:solidFill>
-                  <a:srgbClr val="7A6F66"/>
-                </a:solidFill>
-                <a:latin typeface="Malgun Gothic"/>
-              </a:rPr>
-              <a:t>11</a:t>
-            </a:r>
-          </a:p>
-        </p:txBody>
-      </p:sp>
-      <p:sp>
-        <p:nvSpPr>
-          <p:cNvPr id="6" name="Rounded Rectangle 5"/>
-          <p:cNvSpPr/>
-          <p:nvPr/>
-        </p:nvSpPr>
-        <p:spPr>
-          <a:xfrm>
-            <a:off x="402336" y="1088136"/>
-            <a:ext cx="3218688" cy="5290032"/>
-          </a:xfrm>
-          <a:prstGeom prst="roundRect">
-            <a:avLst>
-              <a:gd name="adj" fmla="val 8000"/>
-            </a:avLst>
-          </a:prstGeom>
-          <a:solidFill>
-            <a:srgbClr val="FFFFFF"/>
-          </a:solidFill>
-          <a:ln w="12700">
-            <a:solidFill>
-              <a:srgbClr val="E2D9CE"/>
-            </a:solidFill>
-          </a:ln>
-          <a:effectLst/>
-        </p:spPr>
-        <p:style>
-          <a:lnRef idx="1">
-            <a:schemeClr val="accent1"/>
-          </a:lnRef>
-          <a:fillRef idx="3">
-            <a:schemeClr val="accent1"/>
-          </a:fillRef>
-          <a:effectRef idx="2">
-            <a:schemeClr val="accent1"/>
-          </a:effectRef>
-          <a:fontRef idx="minor">
-            <a:schemeClr val="lt1"/>
-          </a:fontRef>
-        </p:style>
-        <p:txBody>
-          <a:bodyPr rtlCol="0" anchor="ctr"/>
-          <a:lstStyle/>
-          <a:p>
-            <a:pPr algn="ctr"/>
-          </a:p>
-        </p:txBody>
-      </p:sp>
-      <p:pic>
-        <p:nvPicPr>
-          <p:cNvPr id="7" name="Picture 6" descr="k09-name.png"/>
-          <p:cNvPicPr>
-            <a:picLocks noChangeAspect="1"/>
-          </p:cNvPicPr>
-          <p:nvPr/>
-        </p:nvPicPr>
-        <p:blipFill>
-          <a:blip r:embed="rId2"/>
-          <a:stretch>
-            <a:fillRect/>
-          </a:stretch>
-        </p:blipFill>
-        <p:spPr>
-          <a:xfrm>
-            <a:off x="457200" y="1143000"/>
-            <a:ext cx="3108960" cy="5180304"/>
-          </a:xfrm>
-          <a:prstGeom prst="rect">
-            <a:avLst/>
-          </a:prstGeom>
-        </p:spPr>
-      </p:pic>
-      <p:sp>
-        <p:nvSpPr>
-          <p:cNvPr id="8" name="Rounded Rectangle 7"/>
-          <p:cNvSpPr/>
-          <p:nvPr/>
-        </p:nvSpPr>
-        <p:spPr>
-          <a:xfrm>
-            <a:off x="3831336" y="1088136"/>
-            <a:ext cx="3218688" cy="5290032"/>
-          </a:xfrm>
-          <a:prstGeom prst="roundRect">
-            <a:avLst>
-              <a:gd name="adj" fmla="val 8000"/>
-            </a:avLst>
-          </a:prstGeom>
-          <a:solidFill>
-            <a:srgbClr val="FFFFFF"/>
-          </a:solidFill>
-          <a:ln w="12700">
-            <a:solidFill>
-              <a:srgbClr val="E2D9CE"/>
-            </a:solidFill>
-          </a:ln>
-          <a:effectLst/>
-        </p:spPr>
-        <p:style>
-          <a:lnRef idx="1">
-            <a:schemeClr val="accent1"/>
-          </a:lnRef>
-          <a:fillRef idx="3">
-            <a:schemeClr val="accent1"/>
-          </a:fillRef>
-          <a:effectRef idx="2">
-            <a:schemeClr val="accent1"/>
-          </a:effectRef>
-          <a:fontRef idx="minor">
-            <a:schemeClr val="lt1"/>
-          </a:fontRef>
-        </p:style>
-        <p:txBody>
-          <a:bodyPr rtlCol="0" anchor="ctr"/>
-          <a:lstStyle/>
-          <a:p>
-            <a:pPr algn="ctr"/>
-          </a:p>
-        </p:txBody>
-      </p:sp>
-      <p:pic>
-        <p:nvPicPr>
-          <p:cNvPr id="9" name="Picture 8" descr="k11-done.png"/>
-          <p:cNvPicPr>
-            <a:picLocks noChangeAspect="1"/>
-          </p:cNvPicPr>
-          <p:nvPr/>
-        </p:nvPicPr>
-        <p:blipFill>
-          <a:blip r:embed="rId3"/>
-          <a:stretch>
-            <a:fillRect/>
-          </a:stretch>
-        </p:blipFill>
-        <p:spPr>
-          <a:xfrm>
-            <a:off x="3886200" y="1143000"/>
-            <a:ext cx="3108960" cy="5180304"/>
-          </a:xfrm>
-          <a:prstGeom prst="rect">
-            <a:avLst/>
-          </a:prstGeom>
-        </p:spPr>
-      </p:pic>
-      <p:sp>
-        <p:nvSpPr>
-          <p:cNvPr id="10" name="TextBox 9"/>
-          <p:cNvSpPr txBox="1"/>
-          <p:nvPr/>
-        </p:nvSpPr>
-        <p:spPr>
-          <a:xfrm>
-            <a:off x="7406640" y="1143000"/>
-            <a:ext cx="4327855" cy="4846320"/>
-          </a:xfrm>
-          <a:prstGeom prst="rect">
-            <a:avLst/>
-          </a:prstGeom>
-          <a:noFill/>
-        </p:spPr>
-        <p:txBody>
-          <a:bodyPr wrap="square" lIns="45720" rIns="45720">
-            <a:spAutoFit/>
-          </a:bodyPr>
-          <a:lstStyle/>
-          <a:p>
-            <a:pPr>
-              <a:spcAft>
-                <a:spcPts val="500"/>
-              </a:spcAft>
-            </a:pPr>
-            <a:r>
-              <a:rPr sz="1500">
-                <a:solidFill>
-                  <a:srgbClr val="2B221C"/>
-                </a:solidFill>
-                <a:latin typeface="Malgun Gothic"/>
-              </a:rPr>
-              <a:t>•  최근 3주 안에 주문한 이름이 가나다순 버튼으로. 없으면 [이름 직접 입력]</a:t>
-            </a:r>
-          </a:p>
-          <a:p>
-            <a:pPr>
-              <a:spcAft>
-                <a:spcPts val="500"/>
-              </a:spcAft>
-            </a:pPr>
-            <a:r>
-              <a:rPr sz="1500">
-                <a:solidFill>
-                  <a:srgbClr val="2B221C"/>
-                </a:solidFill>
-                <a:latin typeface="Malgun Gothic"/>
-              </a:rPr>
-              <a:t>•  이름은 20자까지. 음료가 되면 이 이름으로 부른다</a:t>
-            </a:r>
-          </a:p>
-          <a:p>
-            <a:pPr>
-              <a:spcAft>
-                <a:spcPts val="500"/>
-              </a:spcAft>
-            </a:pPr>
-            <a:r>
-              <a:rPr sz="1500">
-                <a:solidFill>
-                  <a:srgbClr val="2B221C"/>
-                </a:solidFill>
-                <a:latin typeface="Malgun Gothic"/>
-              </a:rPr>
-              <a:t>•  [주문 완료] 를 누르면 접수. 주문 번호가 크게 보인다 (당일 1번부터)</a:t>
-            </a:r>
-          </a:p>
-          <a:p>
-            <a:pPr>
-              <a:spcAft>
-                <a:spcPts val="500"/>
-              </a:spcAft>
-            </a:pPr>
-            <a:r>
-              <a:rPr sz="1500">
-                <a:solidFill>
-                  <a:srgbClr val="2B221C"/>
-                </a:solidFill>
-                <a:latin typeface="Malgun Gothic"/>
-              </a:rPr>
-              <a:t>•  [처음으로] 를 누르거나 2분 동안 안 건드리면 첫 화면으로 돌아간다</a:t>
-            </a:r>
-          </a:p>
-          <a:p>
-            <a:pPr>
-              <a:spcAft>
-                <a:spcPts val="500"/>
-              </a:spcAft>
-            </a:pPr>
-            <a:r>
-              <a:rPr sz="1500">
-                <a:solidFill>
-                  <a:srgbClr val="2B221C"/>
-                </a:solidFill>
-                <a:latin typeface="Malgun Gothic"/>
-              </a:rPr>
-              <a:t>•  와이파이가 잠깐 끊겨 두 번 눌러도 주문은 한 번만 들어간다</a:t>
+            <a:pPr algn="l"/>
+            <a:r>
+              <a:rPr sz="1800" b="0">
+                <a:solidFill>
+                  <a:srgbClr val="EEE3D6"/>
+                </a:solidFill>
+                <a:latin typeface="Malgun Gothic"/>
+              </a:rPr>
+              <a:t>만드는 사람이 보는 화면. 주문 처리 · 쿠폰 · 매출 · 설정</a:t>
             </a:r>
           </a:p>
         </p:txBody>
@@ -4178,8 +3880,8 @@
         </p:nvSpPr>
         <p:spPr>
           <a:xfrm>
-            <a:off x="0" y="2377440"/>
-            <a:ext cx="12191695" cy="2103120"/>
+            <a:off x="0" y="0"/>
+            <a:ext cx="12191695" cy="868680"/>
           </a:xfrm>
           <a:prstGeom prst="rect">
             <a:avLst/>
@@ -4222,8 +3924,8 @@
         </p:nvSpPr>
         <p:spPr>
           <a:xfrm>
-            <a:off x="914400" y="2560320"/>
-            <a:ext cx="10332720" cy="914400"/>
+            <a:off x="457200" y="109728"/>
+            <a:ext cx="10058400" cy="685800"/>
           </a:xfrm>
           <a:prstGeom prst="rect">
             <a:avLst/>
@@ -4238,13 +3940,13 @@
           <a:p>
             <a:pPr algn="l"/>
             <a:r>
-              <a:rPr sz="3600" b="1">
+              <a:rPr sz="2600" b="1">
                 <a:solidFill>
                   <a:srgbClr val="FFFFFF"/>
                 </a:solidFill>
                 <a:latin typeface="Malgun Gothic"/>
               </a:rPr>
-              <a:t>2부. 스태프 화면 (폰)</a:t>
+              <a:t>로그인</a:t>
             </a:r>
           </a:p>
         </p:txBody>
@@ -4257,8 +3959,43 @@
         </p:nvSpPr>
         <p:spPr>
           <a:xfrm>
-            <a:off x="914400" y="3474720"/>
-            <a:ext cx="10332720" cy="822960"/>
+            <a:off x="8503920" y="228600"/>
+            <a:ext cx="3291840" cy="457200"/>
+          </a:xfrm>
+          <a:prstGeom prst="rect">
+            <a:avLst/>
+          </a:prstGeom>
+          <a:noFill/>
+        </p:spPr>
+        <p:txBody>
+          <a:bodyPr wrap="square" anchor="ctr" lIns="45720" rIns="45720" tIns="27432" bIns="27432">
+            <a:spAutoFit/>
+          </a:bodyPr>
+          <a:lstStyle/>
+          <a:p>
+            <a:pPr algn="r"/>
+            <a:r>
+              <a:rPr sz="1300" b="0">
+                <a:solidFill>
+                  <a:srgbClr val="EEE3D6"/>
+                </a:solidFill>
+                <a:latin typeface="Malgun Gothic"/>
+              </a:rPr>
+              <a:t>스태프 1/10</a:t>
+            </a:r>
+          </a:p>
+        </p:txBody>
+      </p:sp>
+      <p:sp>
+        <p:nvSpPr>
+          <p:cNvPr id="5" name="TextBox 4"/>
+          <p:cNvSpPr txBox="1"/>
+          <p:nvPr/>
+        </p:nvSpPr>
+        <p:spPr>
+          <a:xfrm>
+            <a:off x="11247120" y="6446520"/>
+            <a:ext cx="822960" cy="320040"/>
           </a:xfrm>
           <a:prstGeom prst="rect">
             <a:avLst/>
@@ -4271,15 +4008,222 @@
           </a:bodyPr>
           <a:lstStyle/>
           <a:p>
-            <a:pPr algn="l"/>
-            <a:r>
-              <a:rPr sz="1800" b="0">
-                <a:solidFill>
-                  <a:srgbClr val="EEE3D6"/>
-                </a:solidFill>
-                <a:latin typeface="Malgun Gothic"/>
-              </a:rPr>
-              <a:t>만드는 사람이 보는 화면. 주문 처리 · 쿠폰 · 매출 · 설정</a:t>
+            <a:pPr algn="r"/>
+            <a:r>
+              <a:rPr sz="1000" b="0">
+                <a:solidFill>
+                  <a:srgbClr val="7A6F66"/>
+                </a:solidFill>
+                <a:latin typeface="Malgun Gothic"/>
+              </a:rPr>
+              <a:t>12</a:t>
+            </a:r>
+          </a:p>
+        </p:txBody>
+      </p:sp>
+      <p:sp>
+        <p:nvSpPr>
+          <p:cNvPr id="6" name="Rounded Rectangle 5"/>
+          <p:cNvSpPr/>
+          <p:nvPr/>
+        </p:nvSpPr>
+        <p:spPr>
+          <a:xfrm>
+            <a:off x="402336" y="1088136"/>
+            <a:ext cx="2497761" cy="5413248"/>
+          </a:xfrm>
+          <a:prstGeom prst="roundRect">
+            <a:avLst>
+              <a:gd name="adj" fmla="val 8000"/>
+            </a:avLst>
+          </a:prstGeom>
+          <a:solidFill>
+            <a:srgbClr val="FFFFFF"/>
+          </a:solidFill>
+          <a:ln w="12700">
+            <a:solidFill>
+              <a:srgbClr val="E2D9CE"/>
+            </a:solidFill>
+          </a:ln>
+          <a:effectLst/>
+        </p:spPr>
+        <p:style>
+          <a:lnRef idx="1">
+            <a:schemeClr val="accent1"/>
+          </a:lnRef>
+          <a:fillRef idx="3">
+            <a:schemeClr val="accent1"/>
+          </a:fillRef>
+          <a:effectRef idx="2">
+            <a:schemeClr val="accent1"/>
+          </a:effectRef>
+          <a:fontRef idx="minor">
+            <a:schemeClr val="lt1"/>
+          </a:fontRef>
+        </p:style>
+        <p:txBody>
+          <a:bodyPr rtlCol="0" anchor="ctr"/>
+          <a:lstStyle/>
+          <a:p>
+            <a:pPr algn="ctr"/>
+          </a:p>
+        </p:txBody>
+      </p:sp>
+      <p:pic>
+        <p:nvPicPr>
+          <p:cNvPr id="7" name="Picture 6" descr="s01-login.png"/>
+          <p:cNvPicPr>
+            <a:picLocks noChangeAspect="1"/>
+          </p:cNvPicPr>
+          <p:nvPr/>
+        </p:nvPicPr>
+        <p:blipFill>
+          <a:blip r:embed="rId2"/>
+          <a:stretch>
+            <a:fillRect/>
+          </a:stretch>
+        </p:blipFill>
+        <p:spPr>
+          <a:xfrm>
+            <a:off x="457200" y="1143000"/>
+            <a:ext cx="2388033" cy="5303520"/>
+          </a:xfrm>
+          <a:prstGeom prst="rect">
+            <a:avLst/>
+          </a:prstGeom>
+        </p:spPr>
+      </p:pic>
+      <p:sp>
+        <p:nvSpPr>
+          <p:cNvPr id="8" name="TextBox 7"/>
+          <p:cNvSpPr txBox="1"/>
+          <p:nvPr/>
+        </p:nvSpPr>
+        <p:spPr>
+          <a:xfrm>
+            <a:off x="3256713" y="1143000"/>
+            <a:ext cx="8477782" cy="4846320"/>
+          </a:xfrm>
+          <a:prstGeom prst="rect">
+            <a:avLst/>
+          </a:prstGeom>
+          <a:noFill/>
+        </p:spPr>
+        <p:txBody>
+          <a:bodyPr wrap="square" lIns="45720" rIns="45720">
+            <a:spAutoFit/>
+          </a:bodyPr>
+          <a:lstStyle/>
+          <a:p>
+            <a:pPr>
+              <a:spcAft>
+                <a:spcPts val="500"/>
+              </a:spcAft>
+            </a:pPr>
+            <a:r>
+              <a:rPr sz="1500">
+                <a:solidFill>
+                  <a:srgbClr val="2B221C"/>
+                </a:solidFill>
+                <a:latin typeface="Malgun Gothic"/>
+              </a:rPr>
+              <a:t>•  PIN 4자리 (운영자가 정한 값). 틀리면 오류</a:t>
+            </a:r>
+          </a:p>
+          <a:p>
+            <a:pPr>
+              <a:spcAft>
+                <a:spcPts val="500"/>
+              </a:spcAft>
+            </a:pPr>
+            <a:r>
+              <a:rPr sz="1500">
+                <a:solidFill>
+                  <a:srgbClr val="2B221C"/>
+                </a:solidFill>
+                <a:latin typeface="Malgun Gothic"/>
+              </a:rPr>
+              <a:t>•  한 번 로그인하면 폰에 저장돼서 브라우저를 닫아도 유지된다</a:t>
+            </a:r>
+          </a:p>
+          <a:p>
+            <a:pPr>
+              <a:spcAft>
+                <a:spcPts val="500"/>
+              </a:spcAft>
+            </a:pPr>
+            <a:r>
+              <a:rPr sz="1500">
+                <a:solidFill>
+                  <a:srgbClr val="2B221C"/>
+                </a:solidFill>
+                <a:latin typeface="Malgun Gothic"/>
+              </a:rPr>
+              <a:t>•  서버(태블릿)가 재시작되면 다시 PIN 을 묻는다 — 정상</a:t>
+            </a:r>
+          </a:p>
+          <a:p>
+            <a:pPr>
+              <a:spcAft>
+                <a:spcPts val="500"/>
+              </a:spcAft>
+            </a:pPr>
+            <a:r>
+              <a:rPr sz="1500">
+                <a:solidFill>
+                  <a:srgbClr val="2B221C"/>
+                </a:solidFill>
+                <a:latin typeface="Malgun Gothic"/>
+              </a:rPr>
+              <a:t>•  오른쪽 위 [나가기] 로 로그아웃</a:t>
+            </a:r>
+          </a:p>
+          <a:p>
+            <a:pPr>
+              <a:spcAft>
+                <a:spcPts val="500"/>
+              </a:spcAft>
+            </a:pPr>
+            <a:r>
+              <a:rPr b="1" sz="1600">
+                <a:solidFill>
+                  <a:srgbClr val="6B452B"/>
+                </a:solidFill>
+                <a:latin typeface="Malgun Gothic"/>
+              </a:rPr>
+              <a:t>상단 집계</a:t>
+            </a:r>
+          </a:p>
+          <a:p>
+            <a:pPr>
+              <a:spcAft>
+                <a:spcPts val="500"/>
+              </a:spcAft>
+            </a:pPr>
+            <a:r>
+              <a:rPr sz="1500">
+                <a:solidFill>
+                  <a:srgbClr val="2B221C"/>
+                </a:solidFill>
+                <a:latin typeface="Malgun Gothic"/>
+              </a:rPr>
+              <a:t>•  오늘 주문 수 · 합계 · 현금/이체/쿠폰/무료잔/사역자 — 취소한 주문은 빠진다</a:t>
+            </a:r>
+          </a:p>
+          <a:p>
+            <a:pPr>
+              <a:spcAft>
+                <a:spcPts val="500"/>
+              </a:spcAft>
+            </a:pPr>
+            <a:r>
+              <a:rPr sz="1500">
+                <a:solidFill>
+                  <a:srgbClr val="2B221C"/>
+                </a:solidFill>
+                <a:latin typeface="Malgun Gothic"/>
+              </a:rPr>
+              <a:t>•  탭: 만들 것 / 완료 / 쿠폰 / 매출 / 설정</a:t>
             </a:r>
           </a:p>
         </p:txBody>
@@ -4384,7 +4328,7 @@
                 </a:solidFill>
                 <a:latin typeface="Malgun Gothic"/>
               </a:rPr>
-              <a:t>로그인</a:t>
+              <a:t>만들 것 — 카드 읽는 법</a:t>
             </a:r>
           </a:p>
         </p:txBody>
@@ -4419,7 +4363,7 @@
                 </a:solidFill>
                 <a:latin typeface="Malgun Gothic"/>
               </a:rPr>
-              <a:t>스태프 1/9</a:t>
+              <a:t>스태프 2/10</a:t>
             </a:r>
           </a:p>
         </p:txBody>
@@ -4509,7 +4453,7 @@
       </p:sp>
       <p:pic>
         <p:nvPicPr>
-          <p:cNvPr id="7" name="Picture 6" descr="s01-login.png"/>
+          <p:cNvPr id="7" name="Picture 6" descr="s02-orders.png"/>
           <p:cNvPicPr>
             <a:picLocks noChangeAspect="1"/>
           </p:cNvPicPr>
@@ -4565,7 +4509,7 @@
                 </a:solidFill>
                 <a:latin typeface="Malgun Gothic"/>
               </a:rPr>
-              <a:t>•  PIN 4자리 (운영자가 정한 값). 틀리면 오류</a:t>
+              <a:t>•  #번호 이름 · 시각. 새 주문은 손대지 않아도 바로 나타난다</a:t>
             </a:r>
           </a:p>
           <a:p>
@@ -4581,7 +4525,7 @@
                 </a:solidFill>
                 <a:latin typeface="Malgun Gothic"/>
               </a:rPr>
-              <a:t>•  한 번 로그인하면 폰에 저장돼서 브라우저를 닫아도 유지된다</a:t>
+              <a:t>•  메뉴 줄: 메뉴 ×잔수, 옵션(샷 추가), (사역자 n) 표시</a:t>
             </a:r>
           </a:p>
           <a:p>
@@ -4597,7 +4541,7 @@
                 </a:solidFill>
                 <a:latin typeface="Malgun Gothic"/>
               </a:rPr>
-              <a:t>•  서버(태블릿)가 재시작되면 다시 PIN 을 묻는다 — 정상</a:t>
+              <a:t>•  결제 줄: "현금 4,500원" 또는 "10,500원 = 쿠폰 4,500원 + 현금 6,000원" 처럼 구성대로</a:t>
             </a:r>
           </a:p>
           <a:p>
@@ -4613,23 +4557,7 @@
                 </a:solidFill>
                 <a:latin typeface="Malgun Gothic"/>
               </a:rPr>
-              <a:t>•  오른쪽 위 [나가기] 로 로그아웃</a:t>
-            </a:r>
-          </a:p>
-          <a:p>
-            <a:pPr>
-              <a:spcAft>
-                <a:spcPts val="500"/>
-              </a:spcAft>
-            </a:pPr>
-            <a:r>
-              <a:rPr b="1" sz="1600">
-                <a:solidFill>
-                  <a:srgbClr val="6B452B"/>
-                </a:solidFill>
-                <a:latin typeface="Malgun Gothic"/>
-              </a:rPr>
-              <a:t>상단 집계</a:t>
+              <a:t>•  💵 현금 10,000원 받음 → 거스름돈 5,500원 쿠폰에 넣기 — 옆의 [잔돈 쿠폰에 넣기] 로 쿠폰에 충전 (다음 장)</a:t>
             </a:r>
           </a:p>
           <a:p>
@@ -4645,7 +4573,7 @@
                 </a:solidFill>
                 <a:latin typeface="Malgun Gothic"/>
               </a:rPr>
-              <a:t>•  오늘 주문 수 · 합계 · 현금/이체/쿠폰/무료잔/사역자 — 취소한 주문은 빠진다</a:t>
+              <a:t>•  📝 메모 (스태프가 수정 화면에서 적은 것)</a:t>
             </a:r>
           </a:p>
           <a:p>
@@ -4661,7 +4589,23 @@
                 </a:solidFill>
                 <a:latin typeface="Malgun Gothic"/>
               </a:rPr>
-              <a:t>•  탭: 만들 것 / 완료 / 쿠폰 / 매출 / 설정</a:t>
+              <a:t>•  수정됨 배지 + 시각 + 이전 내용: 스태프가 고친 주문</a:t>
+            </a:r>
+          </a:p>
+          <a:p>
+            <a:pPr>
+              <a:spcAft>
+                <a:spcPts val="500"/>
+              </a:spcAft>
+            </a:pPr>
+            <a:r>
+              <a:rPr sz="1500">
+                <a:solidFill>
+                  <a:srgbClr val="2B221C"/>
+                </a:solidFill>
+                <a:latin typeface="Malgun Gothic"/>
+              </a:rPr>
+              <a:t>•  오늘 것이 아니면 번호 앞에 날짜가 붙는다 (9/21 #3)</a:t>
             </a:r>
           </a:p>
         </p:txBody>
@@ -4766,7 +4710,7 @@
                 </a:solidFill>
                 <a:latin typeface="Malgun Gothic"/>
               </a:rPr>
-              <a:t>만들 것 — 카드 읽는 법</a:t>
+              <a:t>거스름돈 → 쿠폰</a:t>
             </a:r>
           </a:p>
         </p:txBody>
@@ -4801,7 +4745,7 @@
                 </a:solidFill>
                 <a:latin typeface="Malgun Gothic"/>
               </a:rPr>
-              <a:t>스태프 2/9</a:t>
+              <a:t>스태프 3/10</a:t>
             </a:r>
           </a:p>
         </p:txBody>
@@ -4891,7 +4835,7 @@
       </p:sp>
       <p:pic>
         <p:nvPicPr>
-          <p:cNvPr id="7" name="Picture 6" descr="s02-orders.png"/>
+          <p:cNvPr id="7" name="Picture 6" descr="s17-change-coupon.png"/>
           <p:cNvPicPr>
             <a:picLocks noChangeAspect="1"/>
           </p:cNvPicPr>
@@ -4947,7 +4891,23 @@
                 </a:solidFill>
                 <a:latin typeface="Malgun Gothic"/>
               </a:rPr>
-              <a:t>•  #번호 이름 · 받는 곳(☕ 카페 / 🚶 식당) · 시각. 새 주문은 손대지 않아도 바로 나타난다</a:t>
+              <a:t>•  거스름돈은 현금으로 주지 않는다. 쿠폰에 넣기 전엔 완료 버튼이 [잔돈 쿠폰 먼저] 로 잠긴다</a:t>
+            </a:r>
+          </a:p>
+          <a:p>
+            <a:pPr>
+              <a:spcAft>
+                <a:spcPts val="500"/>
+              </a:spcAft>
+            </a:pPr>
+            <a:r>
+              <a:rPr b="1" sz="1600">
+                <a:solidFill>
+                  <a:srgbClr val="6B452B"/>
+                </a:solidFill>
+                <a:latin typeface="Malgun Gothic"/>
+              </a:rPr>
+              <a:t>쿠폰으로 결제한 주문</a:t>
             </a:r>
           </a:p>
           <a:p>
@@ -4963,7 +4923,23 @@
                 </a:solidFill>
                 <a:latin typeface="Malgun Gothic"/>
               </a:rPr>
-              <a:t>•  메뉴 줄: 메뉴 ×잔수, 옵션(샷 추가), (사역자 n) 표시</a:t>
+              <a:t>•  모자란 만큼 현금을 낸 경우 거스름돈은 접수하자마자 그 쿠폰에 저절로 들어가 있다 — 할 일 없음</a:t>
+            </a:r>
+          </a:p>
+          <a:p>
+            <a:pPr>
+              <a:spcAft>
+                <a:spcPts val="500"/>
+              </a:spcAft>
+            </a:pPr>
+            <a:r>
+              <a:rPr b="1" sz="1600">
+                <a:solidFill>
+                  <a:srgbClr val="6B452B"/>
+                </a:solidFill>
+                <a:latin typeface="Malgun Gothic"/>
+              </a:rPr>
+              <a:t>현금 주문</a:t>
             </a:r>
           </a:p>
           <a:p>
@@ -4979,7 +4955,7 @@
                 </a:solidFill>
                 <a:latin typeface="Malgun Gothic"/>
               </a:rPr>
-              <a:t>•  결제 줄: "현금 4,500원" 또는 "10,500원 = 쿠폰 4,500원 + 현금 6,000원" 처럼 구성대로</a:t>
+              <a:t>•  [잔돈 쿠폰에 넣기] → 주문자 이름의 쿠폰 후보가 뜬다. 하나여도 맞는지 보고 누른다</a:t>
             </a:r>
           </a:p>
           <a:p>
@@ -4995,7 +4971,23 @@
                 </a:solidFill>
                 <a:latin typeface="Malgun Gothic"/>
               </a:rPr>
-              <a:t>•  💵 현금 10,000원 받음 → 거스름돈 5,500원 — 음료와 함께 줄 거스름돈. 옆의 [잔돈 쿠폰에 넣기] 로 잔돈을 쿠폰에 충전할 수도 있다</a:t>
+              <a:t>•  쿠폰이 없으면 이름(채워져 있음) + 전화번호 → [쿠폰 만들고 넣기]. 같은 이름에 다른 사람이면 [＋ 새 쿠폰 만들기]</a:t>
+            </a:r>
+          </a:p>
+          <a:p>
+            <a:pPr>
+              <a:spcAft>
+                <a:spcPts val="500"/>
+              </a:spcAft>
+            </a:pPr>
+            <a:r>
+              <a:rPr b="1" sz="1600">
+                <a:solidFill>
+                  <a:srgbClr val="6B452B"/>
+                </a:solidFill>
+                <a:latin typeface="Malgun Gothic"/>
+              </a:rPr>
+              <a:t>무료 1잔</a:t>
             </a:r>
           </a:p>
           <a:p>
@@ -5011,7 +5003,7 @@
                 </a:solidFill>
                 <a:latin typeface="Malgun Gothic"/>
               </a:rPr>
-              <a:t>•  📝 메모 (스태프가 수정 화면에서 적은 것)</a:t>
+              <a:t>•  거스름돈은 충전 이력·충전 입금에 잡힌다. 무료 1잔은 거스름돈 금액만 본다: 20,000 이상 1잔, 30,000 이상 2잔</a:t>
             </a:r>
           </a:p>
           <a:p>
@@ -5027,23 +5019,7 @@
                 </a:solidFill>
                 <a:latin typeface="Malgun Gothic"/>
               </a:rPr>
-              <a:t>•  수정됨 배지 + 시각 + 이전 내용: 스태프가 고친 주문</a:t>
-            </a:r>
-          </a:p>
-          <a:p>
-            <a:pPr>
-              <a:spcAft>
-                <a:spcPts val="500"/>
-              </a:spcAft>
-            </a:pPr>
-            <a:r>
-              <a:rPr sz="1500">
-                <a:solidFill>
-                  <a:srgbClr val="2B221C"/>
-                </a:solidFill>
-                <a:latin typeface="Malgun Gothic"/>
-              </a:rPr>
-              <a:t>•  오늘 것이 아니면 번호 앞에 날짜가 붙는다 (9/21 #3)</a:t>
+              <a:t>•  예) 잔액 18,000 + 거스름돈 2,500 = 20,500 → 무료잔 없음. 거스름돈이 22,500 이면 → 1잔</a:t>
             </a:r>
           </a:p>
         </p:txBody>
@@ -5183,7 +5159,7 @@
                 </a:solidFill>
                 <a:latin typeface="Malgun Gothic"/>
               </a:rPr>
-              <a:t>스태프 3/9</a:t>
+              <a:t>스태프 4/10</a:t>
             </a:r>
           </a:p>
         </p:txBody>
@@ -5345,7 +5321,7 @@
                 </a:solidFill>
                 <a:latin typeface="Malgun Gothic"/>
               </a:rPr>
-              <a:t>•  완료를 누르는 순간 거스름돈은 "준 것"으로 확정된다</a:t>
+              <a:t>•  거스름돈이 아직 쿠폰에 안 들어갔으면 완료 버튼이 "잔돈 쿠폰 먼저" 로 잠긴다</a:t>
             </a:r>
           </a:p>
           <a:p>
@@ -5533,7 +5509,7 @@
                 </a:solidFill>
                 <a:latin typeface="Malgun Gothic"/>
               </a:rPr>
-              <a:t>스태프 4/9</a:t>
+              <a:t>스태프 5/10</a:t>
             </a:r>
           </a:p>
         </p:txBody>
@@ -5679,7 +5655,7 @@
                 </a:solidFill>
                 <a:latin typeface="Malgun Gothic"/>
               </a:rPr>
-              <a:t>•  [수정] → 이름 · 받는 곳 · 메뉴/수량 · 잔별 옵션(샷 추가/연하게/사역자) · 메모를 고친다. 결제 수단은 못 바꾼다</a:t>
+              <a:t>•  [수정] → 이름 · 메뉴/수량 · 잔별 옵션(샷 추가/연하게/사역자) · 메모를 고친다. 결제 수단은 못 바꾼다</a:t>
             </a:r>
           </a:p>
           <a:p>
@@ -5867,7 +5843,7 @@
                 </a:solidFill>
                 <a:latin typeface="Malgun Gothic"/>
               </a:rPr>
-              <a:t>스태프 5/9</a:t>
+              <a:t>스태프 6/10</a:t>
             </a:r>
           </a:p>
         </p:txBody>
@@ -6109,7 +6085,7 @@
                 </a:solidFill>
                 <a:latin typeface="Malgun Gothic"/>
               </a:rPr>
-              <a:t>•  낸 현금이 있는 주문은 거스름돈이 커질 뿐 — 💵 줄에 반영</a:t>
+              <a:t>•  낸 현금이 있는 주문은 거스름돈이 커질 뿐 — 💵 줄에 반영, 쿠폰에 넣는다 (쿠폰 주문이면 저절로)</a:t>
             </a:r>
           </a:p>
           <a:p>
@@ -6208,7 +6184,7 @@
                 </a:solidFill>
                 <a:latin typeface="Malgun Gothic"/>
               </a:rPr>
-              <a:t>정산을 마쳐야 완료할 수 있다. 완료 뒤 되돌려서 고치면 그 뒤 차액만 주고받는다 (이미 준 거스름돈은 확정).</a:t>
+              <a:t>정산을 마쳐야 완료할 수 있다. 완료 뒤 되돌려서 고치면 그 뒤 차액만 주고받는다 (이미 쿠폰에 넣은 거스름돈은 그대로).</a:t>
             </a:r>
           </a:p>
         </p:txBody>
@@ -6348,7 +6324,7 @@
                 </a:solidFill>
                 <a:latin typeface="Malgun Gothic"/>
               </a:rPr>
-              <a:t>스태프 6/9</a:t>
+              <a:t>스태프 7/10</a:t>
             </a:r>
           </a:p>
         </p:txBody>
@@ -6542,7 +6518,7 @@
                 </a:solidFill>
                 <a:latin typeface="Malgun Gothic"/>
               </a:rPr>
-              <a:t>•  낸 현금이 있으면 거스름돈은 어차피 현금으로 드린다는 안내가 같이 뜬다</a:t>
+              <a:t>•  낸 현금 중 아직 쿠폰에 안 넣은 거스름돈은 같이 돌려준다. 이미 쿠폰에 넣은 잔돈은 쿠폰에 그대로</a:t>
             </a:r>
           </a:p>
           <a:p>
@@ -6698,7 +6674,7 @@
                 </a:solidFill>
                 <a:latin typeface="Malgun Gothic"/>
               </a:rPr>
-              <a:t>스태프 7/9</a:t>
+              <a:t>스태프 8/10</a:t>
             </a:r>
           </a:p>
         </p:txBody>
@@ -7287,7 +7263,23 @@
                 </a:solidFill>
                 <a:latin typeface="Malgun Gothic"/>
               </a:rPr>
-              <a:t>•  손님이 태블릿에서 주문 → 현금은 바구니에 → 폰에 카드가 바로 뜸 → 음료를 만들어 이름을 부르고 거스름돈과 함께 건넴 → 완료</a:t>
+              <a:t>•  손님이 태블릿에서 주문 → 현금은 바구니에 → 폰에 카드가 바로 뜸 → 거스름돈은 쿠폰에 충전 → 음료를 만들어 이름을 부르고 건넴 → 완료</a:t>
+            </a:r>
+          </a:p>
+          <a:p>
+            <a:pPr>
+              <a:spcAft>
+                <a:spcPts val="500"/>
+              </a:spcAft>
+            </a:pPr>
+            <a:r>
+              <a:rPr sz="1500">
+                <a:solidFill>
+                  <a:srgbClr val="2B221C"/>
+                </a:solidFill>
+                <a:latin typeface="Malgun Gothic"/>
+              </a:rPr>
+              <a:t>•  배달은 없다. 모든 주문은 카페에서 이름을 불러 건넨다</a:t>
             </a:r>
           </a:p>
         </p:txBody>
@@ -7510,7 +7502,7 @@
                 </a:solidFill>
                 <a:latin typeface="Malgun Gothic"/>
               </a:rPr>
-              <a:t>스태프 8/9</a:t>
+              <a:t>스태프 9/10</a:t>
             </a:r>
           </a:p>
         </p:txBody>
@@ -7860,7 +7852,7 @@
                 </a:solidFill>
                 <a:latin typeface="Malgun Gothic"/>
               </a:rPr>
-              <a:t>스태프 9/9</a:t>
+              <a:t>스태프 10/10</a:t>
             </a:r>
           </a:p>
         </p:txBody>
@@ -8174,7 +8166,7 @@
                 </a:solidFill>
                 <a:latin typeface="Malgun Gothic"/>
               </a:rPr>
-              <a:t>•  메뉴(카테고리별 접기, 품절 스위치, 순서, 가격) · 옵션 · 카테고리(키오스크 탭 순서) · 배달 장소</a:t>
+              <a:t>•  메뉴(카테고리별 접기, 품절 스위치, 순서, 가격) · 옵션 · 카테고리(키오스크 탭 순서)</a:t>
             </a:r>
           </a:p>
           <a:p>
@@ -8733,7 +8725,7 @@
                 </a:solidFill>
                 <a:latin typeface="Malgun Gothic"/>
               </a:rPr>
-              <a:t>설정 — 옵션 · 카테고리 · 배달 장소</a:t>
+              <a:t>설정 — 옵션 · 카테고리</a:t>
             </a:r>
           </a:p>
         </p:txBody>
@@ -9051,38 +9043,6 @@
                 <a:latin typeface="Malgun Gothic"/>
               </a:rPr>
               <a:t>•  추가 · 이름 변경(메뉴/옵션에 따라감) · 순서(키오스크 탭 순서) · 삭제(메뉴가 없어야)</a:t>
-            </a:r>
-          </a:p>
-          <a:p>
-            <a:pPr>
-              <a:spcAft>
-                <a:spcPts val="500"/>
-              </a:spcAft>
-            </a:pPr>
-            <a:r>
-              <a:rPr b="1" sz="1600">
-                <a:solidFill>
-                  <a:srgbClr val="6B452B"/>
-                </a:solidFill>
-                <a:latin typeface="Malgun Gothic"/>
-              </a:rPr>
-              <a:t>배달 장소</a:t>
-            </a:r>
-          </a:p>
-          <a:p>
-            <a:pPr>
-              <a:spcAft>
-                <a:spcPts val="500"/>
-              </a:spcAft>
-            </a:pPr>
-            <a:r>
-              <a:rPr sz="1500">
-                <a:solidFill>
-                  <a:srgbClr val="2B221C"/>
-                </a:solidFill>
-                <a:latin typeface="Malgun Gothic"/>
-              </a:rPr>
-              <a:t>•  층 + 이름. 표시중/숨김. 숨기면 키오스크 배달 목록에서 빠진다</a:t>
             </a:r>
           </a:p>
         </p:txBody>
@@ -9772,7 +9732,7 @@
                 </a:solidFill>
                 <a:latin typeface="Malgun Gothic"/>
               </a:rPr>
-              <a:t>주문 1/8</a:t>
+              <a:t>주문 1/7</a:t>
             </a:r>
           </a:p>
         </p:txBody>
@@ -10194,7 +10154,7 @@
                 </a:solidFill>
                 <a:latin typeface="Malgun Gothic"/>
               </a:rPr>
-              <a:t>주문 2/8</a:t>
+              <a:t>주문 2/7</a:t>
             </a:r>
           </a:p>
         </p:txBody>
@@ -10712,7 +10672,7 @@
                 </a:solidFill>
                 <a:latin typeface="Malgun Gothic"/>
               </a:rPr>
-              <a:t>받는 방법</a:t>
+              <a:t>결제 수단</a:t>
             </a:r>
           </a:p>
         </p:txBody>
@@ -10747,7 +10707,7 @@
                 </a:solidFill>
                 <a:latin typeface="Malgun Gothic"/>
               </a:rPr>
-              <a:t>주문 3/8</a:t>
+              <a:t>주문 3/7</a:t>
             </a:r>
           </a:p>
         </p:txBody>
@@ -10837,7 +10797,7 @@
       </p:sp>
       <p:pic>
         <p:nvPicPr>
-          <p:cNvPr id="7" name="Picture 6" descr="k04-receive.png"/>
+          <p:cNvPr id="7" name="Picture 6" descr="k06-payment.png"/>
           <p:cNvPicPr>
             <a:picLocks noChangeAspect="1"/>
           </p:cNvPicPr>
@@ -10909,7 +10869,7 @@
       </p:sp>
       <p:pic>
         <p:nvPicPr>
-          <p:cNvPr id="9" name="Picture 8" descr="k05-place.png"/>
+          <p:cNvPr id="9" name="Picture 8" descr="k07-transfer.png"/>
           <p:cNvPicPr>
             <a:picLocks noChangeAspect="1"/>
           </p:cNvPicPr>
@@ -10965,7 +10925,7 @@
                 </a:solidFill>
                 <a:latin typeface="Malgun Gothic"/>
               </a:rPr>
-              <a:t>•  ☕ 카페에서 받기 — 음료가 되면 이름을 불러 준다</a:t>
+              <a:t>•  [주문하기] 다음 바로 이 화면 — 받는 방법은 묻지 않는다 (배달 없음, 전부 카페에서)</a:t>
             </a:r>
           </a:p>
           <a:p>
@@ -10981,7 +10941,23 @@
                 </a:solidFill>
                 <a:latin typeface="Malgun Gothic"/>
               </a:rPr>
-              <a:t>•  🚶 배달 — 1층만 (식당, 전도사님실). 2층 이상은 만드는 사람이 자리를 비워야 해서 안 한다</a:t>
+              <a:t>•  계좌이체 / 쿠폰 / 현금 세 가지</a:t>
+            </a:r>
+          </a:p>
+          <a:p>
+            <a:pPr>
+              <a:spcAft>
+                <a:spcPts val="500"/>
+              </a:spcAft>
+            </a:pPr>
+            <a:r>
+              <a:rPr b="1" sz="1600">
+                <a:solidFill>
+                  <a:srgbClr val="6B452B"/>
+                </a:solidFill>
+                <a:latin typeface="Malgun Gothic"/>
+              </a:rPr>
+              <a:t>계좌이체</a:t>
             </a:r>
           </a:p>
           <a:p>
@@ -10997,7 +10973,39 @@
                 </a:solidFill>
                 <a:latin typeface="Malgun Gothic"/>
               </a:rPr>
-              <a:t>•  배달 장소 목록은 설정 &gt; 배달 장소에서 바꾼다</a:t>
+              <a:t>•  계좌번호가 크게 보인다. 손님이 폰으로 보낸 뒤 [보냈어요]</a:t>
+            </a:r>
+          </a:p>
+          <a:p>
+            <a:pPr>
+              <a:spcAft>
+                <a:spcPts val="500"/>
+              </a:spcAft>
+            </a:pPr>
+            <a:r>
+              <a:rPr sz="1500">
+                <a:solidFill>
+                  <a:srgbClr val="2B221C"/>
+                </a:solidFill>
+                <a:latin typeface="Malgun Gothic"/>
+              </a:rPr>
+              <a:t>•  12초 동안 아무것도 안 누르면 자동으로 다음(이름)으로 넘어간다</a:t>
+            </a:r>
+          </a:p>
+          <a:p>
+            <a:pPr>
+              <a:spcAft>
+                <a:spcPts val="500"/>
+              </a:spcAft>
+            </a:pPr>
+            <a:r>
+              <a:rPr sz="1500">
+                <a:solidFill>
+                  <a:srgbClr val="2B221C"/>
+                </a:solidFill>
+                <a:latin typeface="Malgun Gothic"/>
+              </a:rPr>
+              <a:t>•  스태프는 폰 카드에서 입금을 확인하고 완료한다</a:t>
             </a:r>
           </a:p>
         </p:txBody>
@@ -11102,7 +11110,7 @@
                 </a:solidFill>
                 <a:latin typeface="Malgun Gothic"/>
               </a:rPr>
-              <a:t>결제 수단</a:t>
+              <a:t>현금</a:t>
             </a:r>
           </a:p>
         </p:txBody>
@@ -11137,7 +11145,7 @@
                 </a:solidFill>
                 <a:latin typeface="Malgun Gothic"/>
               </a:rPr>
-              <a:t>주문 4/8</a:t>
+              <a:t>주문 4/7</a:t>
             </a:r>
           </a:p>
         </p:txBody>
@@ -11186,7 +11194,7 @@
         <p:spPr>
           <a:xfrm>
             <a:off x="402336" y="1088136"/>
-            <a:ext cx="3218688" cy="5290032"/>
+            <a:ext cx="3292635" cy="5413248"/>
           </a:xfrm>
           <a:prstGeom prst="roundRect">
             <a:avLst>
@@ -11227,7 +11235,7 @@
       </p:sp>
       <p:pic>
         <p:nvPicPr>
-          <p:cNvPr id="7" name="Picture 6" descr="k06-payment.png"/>
+          <p:cNvPr id="7" name="Picture 6" descr="k08-cash.png"/>
           <p:cNvPicPr>
             <a:picLocks noChangeAspect="1"/>
           </p:cNvPicPr>
@@ -11242,7 +11250,7 @@
         <p:spPr>
           <a:xfrm>
             <a:off x="457200" y="1143000"/>
-            <a:ext cx="3108960" cy="5180304"/>
+            <a:ext cx="3182907" cy="5303520"/>
           </a:xfrm>
           <a:prstGeom prst="rect">
             <a:avLst/>
@@ -11251,86 +11259,14 @@
       </p:pic>
       <p:sp>
         <p:nvSpPr>
-          <p:cNvPr id="8" name="Rounded Rectangle 7"/>
-          <p:cNvSpPr/>
-          <p:nvPr/>
-        </p:nvSpPr>
-        <p:spPr>
-          <a:xfrm>
-            <a:off x="3831336" y="1088136"/>
-            <a:ext cx="3218688" cy="5290032"/>
-          </a:xfrm>
-          <a:prstGeom prst="roundRect">
-            <a:avLst>
-              <a:gd name="adj" fmla="val 8000"/>
-            </a:avLst>
-          </a:prstGeom>
-          <a:solidFill>
-            <a:srgbClr val="FFFFFF"/>
-          </a:solidFill>
-          <a:ln w="12700">
-            <a:solidFill>
-              <a:srgbClr val="E2D9CE"/>
-            </a:solidFill>
-          </a:ln>
-          <a:effectLst/>
-        </p:spPr>
-        <p:style>
-          <a:lnRef idx="1">
-            <a:schemeClr val="accent1"/>
-          </a:lnRef>
-          <a:fillRef idx="3">
-            <a:schemeClr val="accent1"/>
-          </a:fillRef>
-          <a:effectRef idx="2">
-            <a:schemeClr val="accent1"/>
-          </a:effectRef>
-          <a:fontRef idx="minor">
-            <a:schemeClr val="lt1"/>
-          </a:fontRef>
-        </p:style>
-        <p:txBody>
-          <a:bodyPr rtlCol="0" anchor="ctr"/>
-          <a:lstStyle/>
-          <a:p>
-            <a:pPr algn="ctr"/>
-          </a:p>
-        </p:txBody>
-      </p:sp>
-      <p:pic>
-        <p:nvPicPr>
-          <p:cNvPr id="9" name="Picture 8" descr="k07-transfer.png"/>
-          <p:cNvPicPr>
-            <a:picLocks noChangeAspect="1"/>
-          </p:cNvPicPr>
-          <p:nvPr/>
-        </p:nvPicPr>
-        <p:blipFill>
-          <a:blip r:embed="rId3"/>
-          <a:stretch>
-            <a:fillRect/>
-          </a:stretch>
-        </p:blipFill>
-        <p:spPr>
-          <a:xfrm>
-            <a:off x="3886200" y="1143000"/>
-            <a:ext cx="3108960" cy="5180304"/>
-          </a:xfrm>
-          <a:prstGeom prst="rect">
-            <a:avLst/>
-          </a:prstGeom>
-        </p:spPr>
-      </p:pic>
-      <p:sp>
-        <p:nvSpPr>
-          <p:cNvPr id="10" name="TextBox 9"/>
+          <p:cNvPr id="8" name="TextBox 7"/>
           <p:cNvSpPr txBox="1"/>
           <p:nvPr/>
         </p:nvSpPr>
         <p:spPr>
           <a:xfrm>
-            <a:off x="7406640" y="1143000"/>
-            <a:ext cx="4327855" cy="4846320"/>
+            <a:off x="4051587" y="1143000"/>
+            <a:ext cx="7682908" cy="4846320"/>
           </a:xfrm>
           <a:prstGeom prst="rect">
             <a:avLst/>
@@ -11355,7 +11291,39 @@
                 </a:solidFill>
                 <a:latin typeface="Malgun Gothic"/>
               </a:rPr>
-              <a:t>•  계좌이체 / 쿠폰 / 현금 세 가지</a:t>
+              <a:t>•  "현금은 바구니에 넣어주세요" — 손님이 얼마를 냈는지 고른다</a:t>
+            </a:r>
+          </a:p>
+          <a:p>
+            <a:pPr>
+              <a:spcAft>
+                <a:spcPts val="500"/>
+              </a:spcAft>
+            </a:pPr>
+            <a:r>
+              <a:rPr sz="1500">
+                <a:solidFill>
+                  <a:srgbClr val="2B221C"/>
+                </a:solidFill>
+                <a:latin typeface="Malgun Gothic"/>
+              </a:rPr>
+              <a:t>•  [딱 맞게] 또는 총액보다 큰 지폐 단위 (예: 4,500원이면 5,000 / 10,000 / 50,000)</a:t>
+            </a:r>
+          </a:p>
+          <a:p>
+            <a:pPr>
+              <a:spcAft>
+                <a:spcPts val="500"/>
+              </a:spcAft>
+            </a:pPr>
+            <a:r>
+              <a:rPr sz="1500">
+                <a:solidFill>
+                  <a:srgbClr val="2B221C"/>
+                </a:solidFill>
+                <a:latin typeface="Malgun Gothic"/>
+              </a:rPr>
+              <a:t>•  거스름돈이 바로 계산돼 보인다 (10,000 내면 5,500)</a:t>
             </a:r>
           </a:p>
           <a:p>
@@ -11371,7 +11339,7 @@
                 </a:solidFill>
                 <a:latin typeface="Malgun Gothic"/>
               </a:rPr>
-              <a:t>계좌이체</a:t>
+              <a:t>거스름돈은 현금으로 주지 않고 쿠폰에 충전</a:t>
             </a:r>
           </a:p>
           <a:p>
@@ -11387,7 +11355,7 @@
                 </a:solidFill>
                 <a:latin typeface="Malgun Gothic"/>
               </a:rPr>
-              <a:t>•  계좌번호가 크게 보인다. 손님이 폰으로 보낸 뒤 [보냈어요]</a:t>
+              <a:t>•  쿠폰이 있으면 그 쿠폰에, 없으면 스태프가 쿠폰을 만들어 넣는다 (화면에 안내가 뜬다)</a:t>
             </a:r>
           </a:p>
           <a:p>
@@ -11403,7 +11371,7 @@
                 </a:solidFill>
                 <a:latin typeface="Malgun Gothic"/>
               </a:rPr>
-              <a:t>•  12초 동안 아무것도 안 누르면 자동으로 다음(이름)으로 넘어간다</a:t>
+              <a:t>•  쿠폰 잔액이 모자라 나머지를 현금으로 낼 때도 같은 화면 (나머지 금액 기준). 이때 거스름돈은 그 쿠폰에 바로 충전</a:t>
             </a:r>
           </a:p>
           <a:p>
@@ -11419,7 +11387,7 @@
                 </a:solidFill>
                 <a:latin typeface="Malgun Gothic"/>
               </a:rPr>
-              <a:t>•  스태프는 폰 카드에서 입금을 확인하고 완료한다</a:t>
+              <a:t>•  무료 1잔은 거스름돈 금액만 보고 정한다 (20,000 이상 1잔, 30,000 이상 2잔). 기존 잔액과 합쳐 2만원을 넘는 건 해당 없음</a:t>
             </a:r>
           </a:p>
         </p:txBody>
@@ -11524,7 +11492,7 @@
                 </a:solidFill>
                 <a:latin typeface="Malgun Gothic"/>
               </a:rPr>
-              <a:t>현금</a:t>
+              <a:t>쿠폰 (선불)</a:t>
             </a:r>
           </a:p>
         </p:txBody>
@@ -11559,7 +11527,7 @@
                 </a:solidFill>
                 <a:latin typeface="Malgun Gothic"/>
               </a:rPr>
-              <a:t>주문 5/8</a:t>
+              <a:t>주문 5/7</a:t>
             </a:r>
           </a:p>
         </p:txBody>
@@ -11608,7 +11576,7 @@
         <p:spPr>
           <a:xfrm>
             <a:off x="402336" y="1088136"/>
-            <a:ext cx="3292635" cy="5413248"/>
+            <a:ext cx="3218688" cy="5290032"/>
           </a:xfrm>
           <a:prstGeom prst="roundRect">
             <a:avLst>
@@ -11649,7 +11617,7 @@
       </p:sp>
       <p:pic>
         <p:nvPicPr>
-          <p:cNvPr id="7" name="Picture 6" descr="k08-cash.png"/>
+          <p:cNvPr id="7" name="Picture 6" descr="k12-coupon-name.png"/>
           <p:cNvPicPr>
             <a:picLocks noChangeAspect="1"/>
           </p:cNvPicPr>
@@ -11664,7 +11632,7 @@
         <p:spPr>
           <a:xfrm>
             <a:off x="457200" y="1143000"/>
-            <a:ext cx="3182907" cy="5303520"/>
+            <a:ext cx="3108960" cy="5180304"/>
           </a:xfrm>
           <a:prstGeom prst="rect">
             <a:avLst/>
@@ -11673,14 +11641,86 @@
       </p:pic>
       <p:sp>
         <p:nvSpPr>
-          <p:cNvPr id="8" name="TextBox 7"/>
+          <p:cNvPr id="8" name="Rounded Rectangle 7"/>
+          <p:cNvSpPr/>
+          <p:nvPr/>
+        </p:nvSpPr>
+        <p:spPr>
+          <a:xfrm>
+            <a:off x="3831336" y="1088136"/>
+            <a:ext cx="3218688" cy="5290032"/>
+          </a:xfrm>
+          <a:prstGeom prst="roundRect">
+            <a:avLst>
+              <a:gd name="adj" fmla="val 8000"/>
+            </a:avLst>
+          </a:prstGeom>
+          <a:solidFill>
+            <a:srgbClr val="FFFFFF"/>
+          </a:solidFill>
+          <a:ln w="12700">
+            <a:solidFill>
+              <a:srgbClr val="E2D9CE"/>
+            </a:solidFill>
+          </a:ln>
+          <a:effectLst/>
+        </p:spPr>
+        <p:style>
+          <a:lnRef idx="1">
+            <a:schemeClr val="accent1"/>
+          </a:lnRef>
+          <a:fillRef idx="3">
+            <a:schemeClr val="accent1"/>
+          </a:fillRef>
+          <a:effectRef idx="2">
+            <a:schemeClr val="accent1"/>
+          </a:effectRef>
+          <a:fontRef idx="minor">
+            <a:schemeClr val="lt1"/>
+          </a:fontRef>
+        </p:style>
+        <p:txBody>
+          <a:bodyPr rtlCol="0" anchor="ctr"/>
+          <a:lstStyle/>
+          <a:p>
+            <a:pPr algn="ctr"/>
+          </a:p>
+        </p:txBody>
+      </p:sp>
+      <p:pic>
+        <p:nvPicPr>
+          <p:cNvPr id="9" name="Picture 8" descr="k13-coupon-pick.png"/>
+          <p:cNvPicPr>
+            <a:picLocks noChangeAspect="1"/>
+          </p:cNvPicPr>
+          <p:nvPr/>
+        </p:nvPicPr>
+        <p:blipFill>
+          <a:blip r:embed="rId3"/>
+          <a:stretch>
+            <a:fillRect/>
+          </a:stretch>
+        </p:blipFill>
+        <p:spPr>
+          <a:xfrm>
+            <a:off x="3886200" y="1143000"/>
+            <a:ext cx="3108960" cy="5180304"/>
+          </a:xfrm>
+          <a:prstGeom prst="rect">
+            <a:avLst/>
+          </a:prstGeom>
+        </p:spPr>
+      </p:pic>
+      <p:sp>
+        <p:nvSpPr>
+          <p:cNvPr id="10" name="TextBox 9"/>
           <p:cNvSpPr txBox="1"/>
           <p:nvPr/>
         </p:nvSpPr>
         <p:spPr>
           <a:xfrm>
-            <a:off x="4051587" y="1143000"/>
-            <a:ext cx="7682908" cy="4846320"/>
+            <a:off x="7406640" y="1143000"/>
+            <a:ext cx="4327855" cy="4846320"/>
           </a:xfrm>
           <a:prstGeom prst="rect">
             <a:avLst/>
@@ -11705,7 +11745,7 @@
                 </a:solidFill>
                 <a:latin typeface="Malgun Gothic"/>
               </a:rPr>
-              <a:t>•  "현금은 바구니에 넣어주세요" — 손님이 얼마를 냈는지 고른다</a:t>
+              <a:t>•  단골 명단에서 이름을 고르거나 직접 입력 → [쿠폰 조회]</a:t>
             </a:r>
           </a:p>
           <a:p>
@@ -11721,7 +11761,7 @@
                 </a:solidFill>
                 <a:latin typeface="Malgun Gothic"/>
               </a:rPr>
-              <a:t>•  [딱 맞게] 또는 총액보다 큰 지폐 단위 (예: 4,500원이면 5,000 / 10,000 / 50,000)</a:t>
+              <a:t>•  같은 이름이 둘 이상이면 전화번호 뒤 4자리 버튼(010-****-5678)이 떠서 본인 것을 고른다. 숫자를 치는 키패드는 없다</a:t>
             </a:r>
           </a:p>
           <a:p>
@@ -11737,7 +11777,7 @@
                 </a:solidFill>
                 <a:latin typeface="Malgun Gothic"/>
               </a:rPr>
-              <a:t>•  거스름돈이 바로 계산돼 보인다 (10,000 내면 5,500)</a:t>
+              <a:t>•  전화번호가 등록되지 않은 쿠폰이 섞여 있으면 "스태프에게 말씀해 주세요" 안내</a:t>
             </a:r>
           </a:p>
           <a:p>
@@ -11753,23 +11793,7 @@
                 </a:solidFill>
                 <a:latin typeface="Malgun Gothic"/>
               </a:rPr>
-              <a:t>•  거스름돈은 스태프 폰 카드에 💵 로 표시되고, 음료와 함께 건넨다</a:t>
-            </a:r>
-          </a:p>
-          <a:p>
-            <a:pPr>
-              <a:spcAft>
-                <a:spcPts val="500"/>
-              </a:spcAft>
-            </a:pPr>
-            <a:r>
-              <a:rPr sz="1500">
-                <a:solidFill>
-                  <a:srgbClr val="2B221C"/>
-                </a:solidFill>
-                <a:latin typeface="Malgun Gothic"/>
-              </a:rPr>
-              <a:t>•  쿠폰 잔액이 모자라 나머지를 현금으로 낼 때도 같은 화면 (나머지 금액 기준)</a:t>
+              <a:t>•  쿠폰으로 결제하면 이름 화면은 건너뛴다 (쿠폰 주인 이름으로 접수)</a:t>
             </a:r>
           </a:p>
         </p:txBody>
@@ -11874,7 +11898,7 @@
                 </a:solidFill>
                 <a:latin typeface="Malgun Gothic"/>
               </a:rPr>
-              <a:t>쿠폰 (선불)</a:t>
+              <a:t>쿠폰 — 잔액과 무료 1잔</a:t>
             </a:r>
           </a:p>
         </p:txBody>
@@ -11909,7 +11933,7 @@
                 </a:solidFill>
                 <a:latin typeface="Malgun Gothic"/>
               </a:rPr>
-              <a:t>주문 6/8</a:t>
+              <a:t>주문 6/7</a:t>
             </a:r>
           </a:p>
         </p:txBody>
@@ -11999,7 +12023,7 @@
       </p:sp>
       <p:pic>
         <p:nvPicPr>
-          <p:cNvPr id="7" name="Picture 6" descr="k12-coupon-name.png"/>
+          <p:cNvPr id="7" name="Picture 6" descr="k14-coupon-found.png"/>
           <p:cNvPicPr>
             <a:picLocks noChangeAspect="1"/>
           </p:cNvPicPr>
@@ -12071,7 +12095,7 @@
       </p:sp>
       <p:pic>
         <p:nvPicPr>
-          <p:cNvPr id="9" name="Picture 8" descr="k13-coupon-pick.png"/>
+          <p:cNvPr id="9" name="Picture 8" descr="k15-coupon-free.png"/>
           <p:cNvPicPr>
             <a:picLocks noChangeAspect="1"/>
           </p:cNvPicPr>
@@ -12127,7 +12151,23 @@
                 </a:solidFill>
                 <a:latin typeface="Malgun Gothic"/>
               </a:rPr>
-              <a:t>•  단골 명단에서 이름을 고르거나 직접 입력 → [쿠폰 조회]</a:t>
+              <a:t>•  잔액이 크게 보이고, 주문 금액 전액이 잔액에서 빠진다</a:t>
+            </a:r>
+          </a:p>
+          <a:p>
+            <a:pPr>
+              <a:spcAft>
+                <a:spcPts val="500"/>
+              </a:spcAft>
+            </a:pPr>
+            <a:r>
+              <a:rPr b="1" sz="1600">
+                <a:solidFill>
+                  <a:srgbClr val="6B452B"/>
+                </a:solidFill>
+                <a:latin typeface="Malgun Gothic"/>
+              </a:rPr>
+              <a:t>무료 1잔 쓰기</a:t>
             </a:r>
           </a:p>
           <a:p>
@@ -12143,7 +12183,7 @@
                 </a:solidFill>
                 <a:latin typeface="Malgun Gothic"/>
               </a:rPr>
-              <a:t>•  같은 이름이 둘 이상이면 전화번호 뒤 4자리 버튼(010-****-5678)이 떠서 본인 것을 고른다. 숫자를 치는 키패드는 없다</a:t>
+              <a:t>•  남은 무료 1잔이 있으면 체크박스. 켜면 이번 주문에서 가장 비싼 한 잔(옵션 포함가)이 무료</a:t>
             </a:r>
           </a:p>
           <a:p>
@@ -12159,7 +12199,23 @@
                 </a:solidFill>
                 <a:latin typeface="Malgun Gothic"/>
               </a:rPr>
-              <a:t>•  전화번호가 등록되지 않은 쿠폰이 섞여 있으면 "스태프에게 말씀해 주세요" 안내</a:t>
+              <a:t>•  사역자 무료로 표시한 잔은 무료 1잔 후보가 아니다</a:t>
+            </a:r>
+          </a:p>
+          <a:p>
+            <a:pPr>
+              <a:spcAft>
+                <a:spcPts val="500"/>
+              </a:spcAft>
+            </a:pPr>
+            <a:r>
+              <a:rPr b="1" sz="1600">
+                <a:solidFill>
+                  <a:srgbClr val="6B452B"/>
+                </a:solidFill>
+                <a:latin typeface="Malgun Gothic"/>
+              </a:rPr>
+              <a:t>잔액 부족</a:t>
             </a:r>
           </a:p>
           <a:p>
@@ -12175,7 +12231,23 @@
                 </a:solidFill>
                 <a:latin typeface="Malgun Gothic"/>
               </a:rPr>
-              <a:t>•  쿠폰으로 결제하면 이름 화면은 건너뛴다 (쿠폰 주인 이름으로 접수)</a:t>
+              <a:t>•  잔액을 다 쓰고 남는 금액은 현금 또는 계좌이체 중 골라서 낸다</a:t>
+            </a:r>
+          </a:p>
+          <a:p>
+            <a:pPr>
+              <a:spcAft>
+                <a:spcPts val="500"/>
+              </a:spcAft>
+            </a:pPr>
+            <a:r>
+              <a:rPr sz="1500">
+                <a:solidFill>
+                  <a:srgbClr val="2B221C"/>
+                </a:solidFill>
+                <a:latin typeface="Malgun Gothic"/>
+              </a:rPr>
+              <a:t>•  현금이면 낸 돈 화면을 한 번 더 거친다. 거스름돈은 이 쿠폰에 바로 충전되고 완료 화면에 보인다</a:t>
             </a:r>
           </a:p>
         </p:txBody>
